--- a/test/fixtures/sample.pptx
+++ b/test/fixtures/sample.pptx
@@ -1023,7 +1023,7 @@
                   <a:srgbClr val="000000"/>
                 </a:solidFill>
               </a:rPr>
-              <a:t>Kiln fixture marker 4711</a:t>
+              <a:t>Recast fixture marker 4711</a:t>
             </a:r>
             <a:endParaRPr lang="en-US" sz="1600" dirty="0"/>
           </a:p>
